--- a/推广/1688選品篩選工作冊.pptx
+++ b/推广/1688選品篩選工作冊.pptx
@@ -11806,12 +11806,12 @@
         </p:nvSpPr>
         <p:spPr>
           <a:xfrm>
-            <a:off x="457200" y="1463040"/>
-            <a:ext cx="4663440" cy="868680"/>
+            <a:off x="457200" y="1371600"/>
+            <a:ext cx="4663440" cy="777240"/>
           </a:xfrm>
           <a:prstGeom prst="roundRect">
             <a:avLst>
-              <a:gd name="adj" fmla="val 8421"/>
+              <a:gd name="adj" fmla="val 9412"/>
             </a:avLst>
           </a:prstGeom>
           <a:solidFill>
@@ -11828,24 +11828,24 @@
         </p:nvSpPr>
         <p:spPr>
           <a:xfrm>
-            <a:off x="640080" y="1463040"/>
-            <a:ext cx="4343400" cy="868680"/>
-          </a:xfrm>
-          <a:prstGeom prst="rect">
-            <a:avLst/>
-          </a:prstGeom>
-          <a:noFill/>
-          <a:ln/>
-        </p:spPr>
-        <p:txBody>
-          <a:bodyPr wrap="square" lIns="0" tIns="0" rIns="0" bIns="0" rtlCol="0" anchor="ctr"/>
-          <a:lstStyle/>
-          <a:p>
-            <a:pPr indent="0" marL="0">
-              <a:buNone/>
-            </a:pPr>
-            <a:r>
-              <a:rPr lang="en-US" sz="1250" b="1" dirty="0">
+            <a:off x="640080" y="1371600"/>
+            <a:ext cx="4343400" cy="777240"/>
+          </a:xfrm>
+          <a:prstGeom prst="rect">
+            <a:avLst/>
+          </a:prstGeom>
+          <a:noFill/>
+          <a:ln/>
+        </p:spPr>
+        <p:txBody>
+          <a:bodyPr wrap="square" lIns="0" tIns="0" rIns="0" bIns="0" rtlCol="0" anchor="ctr"/>
+          <a:lstStyle/>
+          <a:p>
+            <a:pPr indent="0" marL="0">
+              <a:buNone/>
+            </a:pPr>
+            <a:r>
+              <a:rPr lang="en-US" sz="1200" b="1" dirty="0">
                 <a:solidFill>
                   <a:srgbClr val="15514C"/>
                 </a:solidFill>
@@ -11853,9 +11853,9 @@
                 <a:ea typeface="Microsoft JhengHei" pitchFamily="34" charset="-122"/>
                 <a:cs typeface="Microsoft JhengHei" pitchFamily="34" charset="-120"/>
               </a:rPr>
-              <a:t>「評估這個新品」（截圖拖進對話）</a:t>
-            </a:r>
-            <a:endParaRPr lang="en-US" sz="1250" dirty="0"/>
+              <a:t>「我想找新品」</a:t>
+            </a:r>
+            <a:endParaRPr lang="en-US" sz="1200" dirty="0"/>
           </a:p>
         </p:txBody>
       </p:sp>
@@ -11867,8 +11867,8 @@
         </p:nvSpPr>
         <p:spPr>
           <a:xfrm>
-            <a:off x="5230368" y="1463040"/>
-            <a:ext cx="457200" cy="868680"/>
+            <a:off x="5230368" y="1371600"/>
+            <a:ext cx="457200" cy="777240"/>
           </a:xfrm>
           <a:prstGeom prst="rect">
             <a:avLst/>
@@ -11884,7 +11884,7 @@
               <a:buNone/>
             </a:pPr>
             <a:r>
-              <a:rPr lang="en-US" sz="2000" b="1" dirty="0">
+              <a:rPr lang="en-US" sz="1800" b="1" dirty="0">
                 <a:solidFill>
                   <a:srgbClr val="E8590C"/>
                 </a:solidFill>
@@ -11894,7 +11894,7 @@
               </a:rPr>
               <a:t>→</a:t>
             </a:r>
-            <a:endParaRPr lang="en-US" sz="2000" dirty="0"/>
+            <a:endParaRPr lang="en-US" sz="1800" dirty="0"/>
           </a:p>
         </p:txBody>
       </p:sp>
@@ -11906,7 +11906,46 @@
         </p:nvSpPr>
         <p:spPr>
           <a:xfrm>
-            <a:off x="5806440" y="1517904"/>
+            <a:off x="5806440" y="1408176"/>
+            <a:ext cx="5852160" cy="329184"/>
+          </a:xfrm>
+          <a:prstGeom prst="rect">
+            <a:avLst/>
+          </a:prstGeom>
+          <a:noFill/>
+          <a:ln/>
+        </p:spPr>
+        <p:txBody>
+          <a:bodyPr wrap="square" lIns="0" tIns="0" rIns="0" bIns="0" rtlCol="0" anchor="ctr"/>
+          <a:lstStyle/>
+          <a:p>
+            <a:pPr indent="0" marL="0">
+              <a:buNone/>
+            </a:pPr>
+            <a:r>
+              <a:rPr lang="en-US" sz="1400" b="1" dirty="0">
+                <a:solidFill>
+                  <a:srgbClr val="1F2937"/>
+                </a:solidFill>
+                <a:latin typeface="Microsoft JhengHei" pitchFamily="34" charset="0"/>
+                <a:ea typeface="Microsoft JhengHei" pitchFamily="34" charset="-122"/>
+                <a:cs typeface="Microsoft JhengHei" pitchFamily="34" charset="-120"/>
+              </a:rPr>
+              <a:t>採購經理提問模式</a:t>
+            </a:r>
+            <a:endParaRPr lang="en-US" sz="1400" dirty="0"/>
+          </a:p>
+        </p:txBody>
+      </p:sp>
+      <p:sp>
+        <p:nvSpPr>
+          <p:cNvPr id="8" name="Text 6"/>
+          <p:cNvSpPr/>
+          <p:nvPr/>
+        </p:nvSpPr>
+        <p:spPr>
+          <a:xfrm>
+            <a:off x="5806440" y="1755648"/>
             <a:ext cx="5852160" cy="365760"/>
           </a:xfrm>
           <a:prstGeom prst="rect">
@@ -11923,46 +11962,7 @@
               <a:buNone/>
             </a:pPr>
             <a:r>
-              <a:rPr lang="en-US" sz="1450" b="1" dirty="0">
-                <a:solidFill>
-                  <a:srgbClr val="1F2937"/>
-                </a:solidFill>
-                <a:latin typeface="Microsoft JhengHei" pitchFamily="34" charset="0"/>
-                <a:ea typeface="Microsoft JhengHei" pitchFamily="34" charset="-122"/>
-                <a:cs typeface="Microsoft JhengHei" pitchFamily="34" charset="-120"/>
-              </a:rPr>
-              <a:t>選品評估卡初稿</a:t>
-            </a:r>
-            <a:endParaRPr lang="en-US" sz="1450" dirty="0"/>
-          </a:p>
-        </p:txBody>
-      </p:sp>
-      <p:sp>
-        <p:nvSpPr>
-          <p:cNvPr id="8" name="Text 6"/>
-          <p:cNvSpPr/>
-          <p:nvPr/>
-        </p:nvSpPr>
-        <p:spPr>
-          <a:xfrm>
-            <a:off x="5806440" y="1892808"/>
-            <a:ext cx="5852160" cy="411480"/>
-          </a:xfrm>
-          <a:prstGeom prst="rect">
-            <a:avLst/>
-          </a:prstGeom>
-          <a:noFill/>
-          <a:ln/>
-        </p:spPr>
-        <p:txBody>
-          <a:bodyPr wrap="square" lIns="0" tIns="0" rIns="0" bIns="0" rtlCol="0" anchor="ctr"/>
-          <a:lstStyle/>
-          <a:p>
-            <a:pPr indent="0" marL="0">
-              <a:buNone/>
-            </a:pPr>
-            <a:r>
-              <a:rPr lang="en-US" sz="1150" dirty="0">
+              <a:rPr lang="en-US" sz="1100" dirty="0">
                 <a:solidFill>
                   <a:srgbClr val="64748B"/>
                 </a:solidFill>
@@ -11970,9 +11970,9 @@
                 <a:ea typeface="Microsoft JhengHei" pitchFamily="34" charset="-122"/>
                 <a:cs typeface="Microsoft JhengHei" pitchFamily="34" charset="-120"/>
               </a:rPr>
-              <a:t>賣點、售價區間、認證清單、風險、要問工廠的問題，一次列全</a:t>
-            </a:r>
-            <a:endParaRPr lang="en-US" sz="1150" dirty="0"/>
+              <a:t>不知道從哪開始？它一題一題問你，帶你走完整個選品流程</a:t>
+            </a:r>
+            <a:endParaRPr lang="en-US" sz="1100" dirty="0"/>
           </a:p>
         </p:txBody>
       </p:sp>
@@ -11984,12 +11984,12 @@
         </p:nvSpPr>
         <p:spPr>
           <a:xfrm>
-            <a:off x="457200" y="2542032"/>
-            <a:ext cx="4663440" cy="868680"/>
+            <a:off x="457200" y="2267712"/>
+            <a:ext cx="4663440" cy="777240"/>
           </a:xfrm>
           <a:prstGeom prst="roundRect">
             <a:avLst>
-              <a:gd name="adj" fmla="val 8421"/>
+              <a:gd name="adj" fmla="val 9412"/>
             </a:avLst>
           </a:prstGeom>
           <a:solidFill>
@@ -12006,24 +12006,24 @@
         </p:nvSpPr>
         <p:spPr>
           <a:xfrm>
-            <a:off x="640080" y="2542032"/>
-            <a:ext cx="4343400" cy="868680"/>
-          </a:xfrm>
-          <a:prstGeom prst="rect">
-            <a:avLst/>
-          </a:prstGeom>
-          <a:noFill/>
-          <a:ln/>
-        </p:spPr>
-        <p:txBody>
-          <a:bodyPr wrap="square" lIns="0" tIns="0" rIns="0" bIns="0" rtlCol="0" anchor="ctr"/>
-          <a:lstStyle/>
-          <a:p>
-            <a:pPr indent="0" marL="0">
-              <a:buNone/>
-            </a:pPr>
-            <a:r>
-              <a:rPr lang="en-US" sz="1250" b="1" dirty="0">
+            <a:off x="640080" y="2267712"/>
+            <a:ext cx="4343400" cy="777240"/>
+          </a:xfrm>
+          <a:prstGeom prst="rect">
+            <a:avLst/>
+          </a:prstGeom>
+          <a:noFill/>
+          <a:ln/>
+        </p:spPr>
+        <p:txBody>
+          <a:bodyPr wrap="square" lIns="0" tIns="0" rIns="0" bIns="0" rtlCol="0" anchor="ctr"/>
+          <a:lstStyle/>
+          <a:p>
+            <a:pPr indent="0" marL="0">
+              <a:buNone/>
+            </a:pPr>
+            <a:r>
+              <a:rPr lang="en-US" sz="1200" b="1" dirty="0">
                 <a:solidFill>
                   <a:srgbClr val="15514C"/>
                 </a:solidFill>
@@ -12031,9 +12031,9 @@
                 <a:ea typeface="Microsoft JhengHei" pitchFamily="34" charset="-122"/>
                 <a:cs typeface="Microsoft JhengHei" pitchFamily="34" charset="-120"/>
               </a:rPr>
-              <a:t>「查一下這家工廠的底細」</a:t>
-            </a:r>
-            <a:endParaRPr lang="en-US" sz="1250" dirty="0"/>
+              <a:t>「評估這個新品」（截圖拖進對話）</a:t>
+            </a:r>
+            <a:endParaRPr lang="en-US" sz="1200" dirty="0"/>
           </a:p>
         </p:txBody>
       </p:sp>
@@ -12045,8 +12045,8 @@
         </p:nvSpPr>
         <p:spPr>
           <a:xfrm>
-            <a:off x="5230368" y="2542032"/>
-            <a:ext cx="457200" cy="868680"/>
+            <a:off x="5230368" y="2267712"/>
+            <a:ext cx="457200" cy="777240"/>
           </a:xfrm>
           <a:prstGeom prst="rect">
             <a:avLst/>
@@ -12062,7 +12062,7 @@
               <a:buNone/>
             </a:pPr>
             <a:r>
-              <a:rPr lang="en-US" sz="2000" b="1" dirty="0">
+              <a:rPr lang="en-US" sz="1800" b="1" dirty="0">
                 <a:solidFill>
                   <a:srgbClr val="E8590C"/>
                 </a:solidFill>
@@ -12072,7 +12072,7 @@
               </a:rPr>
               <a:t>→</a:t>
             </a:r>
-            <a:endParaRPr lang="en-US" sz="2000" dirty="0"/>
+            <a:endParaRPr lang="en-US" sz="1800" dirty="0"/>
           </a:p>
         </p:txBody>
       </p:sp>
@@ -12084,7 +12084,46 @@
         </p:nvSpPr>
         <p:spPr>
           <a:xfrm>
-            <a:off x="5806440" y="2596896"/>
+            <a:off x="5806440" y="2304288"/>
+            <a:ext cx="5852160" cy="329184"/>
+          </a:xfrm>
+          <a:prstGeom prst="rect">
+            <a:avLst/>
+          </a:prstGeom>
+          <a:noFill/>
+          <a:ln/>
+        </p:spPr>
+        <p:txBody>
+          <a:bodyPr wrap="square" lIns="0" tIns="0" rIns="0" bIns="0" rtlCol="0" anchor="ctr"/>
+          <a:lstStyle/>
+          <a:p>
+            <a:pPr indent="0" marL="0">
+              <a:buNone/>
+            </a:pPr>
+            <a:r>
+              <a:rPr lang="en-US" sz="1400" b="1" dirty="0">
+                <a:solidFill>
+                  <a:srgbClr val="1F2937"/>
+                </a:solidFill>
+                <a:latin typeface="Microsoft JhengHei" pitchFamily="34" charset="0"/>
+                <a:ea typeface="Microsoft JhengHei" pitchFamily="34" charset="-122"/>
+                <a:cs typeface="Microsoft JhengHei" pitchFamily="34" charset="-120"/>
+              </a:rPr>
+              <a:t>選品評估卡初稿</a:t>
+            </a:r>
+            <a:endParaRPr lang="en-US" sz="1400" dirty="0"/>
+          </a:p>
+        </p:txBody>
+      </p:sp>
+      <p:sp>
+        <p:nvSpPr>
+          <p:cNvPr id="13" name="Text 11"/>
+          <p:cNvSpPr/>
+          <p:nvPr/>
+        </p:nvSpPr>
+        <p:spPr>
+          <a:xfrm>
+            <a:off x="5806440" y="2651760"/>
             <a:ext cx="5852160" cy="365760"/>
           </a:xfrm>
           <a:prstGeom prst="rect">
@@ -12101,46 +12140,7 @@
               <a:buNone/>
             </a:pPr>
             <a:r>
-              <a:rPr lang="en-US" sz="1450" b="1" dirty="0">
-                <a:solidFill>
-                  <a:srgbClr val="1F2937"/>
-                </a:solidFill>
-                <a:latin typeface="Microsoft JhengHei" pitchFamily="34" charset="0"/>
-                <a:ea typeface="Microsoft JhengHei" pitchFamily="34" charset="-122"/>
-                <a:cs typeface="Microsoft JhengHei" pitchFamily="34" charset="-120"/>
-              </a:rPr>
-              <a:t>工廠背調卡</a:t>
-            </a:r>
-            <a:endParaRPr lang="en-US" sz="1450" dirty="0"/>
-          </a:p>
-        </p:txBody>
-      </p:sp>
-      <p:sp>
-        <p:nvSpPr>
-          <p:cNvPr id="13" name="Text 11"/>
-          <p:cNvSpPr/>
-          <p:nvPr/>
-        </p:nvSpPr>
-        <p:spPr>
-          <a:xfrm>
-            <a:off x="5806440" y="2971800"/>
-            <a:ext cx="5852160" cy="411480"/>
-          </a:xfrm>
-          <a:prstGeom prst="rect">
-            <a:avLst/>
-          </a:prstGeom>
-          <a:noFill/>
-          <a:ln/>
-        </p:spPr>
-        <p:txBody>
-          <a:bodyPr wrap="square" lIns="0" tIns="0" rIns="0" bIns="0" rtlCol="0" anchor="ctr"/>
-          <a:lstStyle/>
-          <a:p>
-            <a:pPr indent="0" marL="0">
-              <a:buNone/>
-            </a:pPr>
-            <a:r>
-              <a:rPr lang="en-US" sz="1150" dirty="0">
+              <a:rPr lang="en-US" sz="1100" dirty="0">
                 <a:solidFill>
                   <a:srgbClr val="64748B"/>
                 </a:solidFill>
@@ -12148,9 +12148,9 @@
                 <a:ea typeface="Microsoft JhengHei" pitchFamily="34" charset="-122"/>
                 <a:cs typeface="Microsoft JhengHei" pitchFamily="34" charset="-120"/>
               </a:rPr>
-              <a:t>工廠還是貿易商＋風險記錄＋針對性驗廠提問清單</a:t>
-            </a:r>
-            <a:endParaRPr lang="en-US" sz="1150" dirty="0"/>
+              <a:t>賣點、售價區間、認證清單、風險、要問工廠的問題，一次列全</a:t>
+            </a:r>
+            <a:endParaRPr lang="en-US" sz="1100" dirty="0"/>
           </a:p>
         </p:txBody>
       </p:sp>
@@ -12162,12 +12162,12 @@
         </p:nvSpPr>
         <p:spPr>
           <a:xfrm>
-            <a:off x="457200" y="3621024"/>
-            <a:ext cx="4663440" cy="868680"/>
+            <a:off x="457200" y="3163824"/>
+            <a:ext cx="4663440" cy="777240"/>
           </a:xfrm>
           <a:prstGeom prst="roundRect">
             <a:avLst>
-              <a:gd name="adj" fmla="val 8421"/>
+              <a:gd name="adj" fmla="val 9412"/>
             </a:avLst>
           </a:prstGeom>
           <a:solidFill>
@@ -12184,24 +12184,24 @@
         </p:nvSpPr>
         <p:spPr>
           <a:xfrm>
-            <a:off x="640080" y="3621024"/>
-            <a:ext cx="4343400" cy="868680"/>
-          </a:xfrm>
-          <a:prstGeom prst="rect">
-            <a:avLst/>
-          </a:prstGeom>
-          <a:noFill/>
-          <a:ln/>
-        </p:spPr>
-        <p:txBody>
-          <a:bodyPr wrap="square" lIns="0" tIns="0" rIns="0" bIns="0" rtlCol="0" anchor="ctr"/>
-          <a:lstStyle/>
-          <a:p>
-            <a:pPr indent="0" marL="0">
-              <a:buNone/>
-            </a:pPr>
-            <a:r>
-              <a:rPr lang="en-US" sz="1250" b="1" dirty="0">
+            <a:off x="640080" y="3163824"/>
+            <a:ext cx="4343400" cy="777240"/>
+          </a:xfrm>
+          <a:prstGeom prst="rect">
+            <a:avLst/>
+          </a:prstGeom>
+          <a:noFill/>
+          <a:ln/>
+        </p:spPr>
+        <p:txBody>
+          <a:bodyPr wrap="square" lIns="0" tIns="0" rIns="0" bIns="0" rtlCol="0" anchor="ctr"/>
+          <a:lstStyle/>
+          <a:p>
+            <a:pPr indent="0" marL="0">
+              <a:buNone/>
+            </a:pPr>
+            <a:r>
+              <a:rPr lang="en-US" sz="1200" b="1" dirty="0">
                 <a:solidFill>
                   <a:srgbClr val="15514C"/>
                 </a:solidFill>
@@ -12209,9 +12209,9 @@
                 <a:ea typeface="Microsoft JhengHei" pitchFamily="34" charset="-122"/>
                 <a:cs typeface="Microsoft JhengHei" pitchFamily="34" charset="-120"/>
               </a:rPr>
-              <a:t>「這幾份報價幫我對比」（拖文件）</a:t>
-            </a:r>
-            <a:endParaRPr lang="en-US" sz="1250" dirty="0"/>
+              <a:t>「查一下這家工廠的底細」</a:t>
+            </a:r>
+            <a:endParaRPr lang="en-US" sz="1200" dirty="0"/>
           </a:p>
         </p:txBody>
       </p:sp>
@@ -12223,8 +12223,8 @@
         </p:nvSpPr>
         <p:spPr>
           <a:xfrm>
-            <a:off x="5230368" y="3621024"/>
-            <a:ext cx="457200" cy="868680"/>
+            <a:off x="5230368" y="3163824"/>
+            <a:ext cx="457200" cy="777240"/>
           </a:xfrm>
           <a:prstGeom prst="rect">
             <a:avLst/>
@@ -12240,7 +12240,7 @@
               <a:buNone/>
             </a:pPr>
             <a:r>
-              <a:rPr lang="en-US" sz="2000" b="1" dirty="0">
+              <a:rPr lang="en-US" sz="1800" b="1" dirty="0">
                 <a:solidFill>
                   <a:srgbClr val="E8590C"/>
                 </a:solidFill>
@@ -12250,7 +12250,7 @@
               </a:rPr>
               <a:t>→</a:t>
             </a:r>
-            <a:endParaRPr lang="en-US" sz="2000" dirty="0"/>
+            <a:endParaRPr lang="en-US" sz="1800" dirty="0"/>
           </a:p>
         </p:txBody>
       </p:sp>
@@ -12262,7 +12262,46 @@
         </p:nvSpPr>
         <p:spPr>
           <a:xfrm>
-            <a:off x="5806440" y="3675888"/>
+            <a:off x="5806440" y="3200400"/>
+            <a:ext cx="5852160" cy="329184"/>
+          </a:xfrm>
+          <a:prstGeom prst="rect">
+            <a:avLst/>
+          </a:prstGeom>
+          <a:noFill/>
+          <a:ln/>
+        </p:spPr>
+        <p:txBody>
+          <a:bodyPr wrap="square" lIns="0" tIns="0" rIns="0" bIns="0" rtlCol="0" anchor="ctr"/>
+          <a:lstStyle/>
+          <a:p>
+            <a:pPr indent="0" marL="0">
+              <a:buNone/>
+            </a:pPr>
+            <a:r>
+              <a:rPr lang="en-US" sz="1400" b="1" dirty="0">
+                <a:solidFill>
+                  <a:srgbClr val="1F2937"/>
+                </a:solidFill>
+                <a:latin typeface="Microsoft JhengHei" pitchFamily="34" charset="0"/>
+                <a:ea typeface="Microsoft JhengHei" pitchFamily="34" charset="-122"/>
+                <a:cs typeface="Microsoft JhengHei" pitchFamily="34" charset="-120"/>
+              </a:rPr>
+              <a:t>工廠背調卡</a:t>
+            </a:r>
+            <a:endParaRPr lang="en-US" sz="1400" dirty="0"/>
+          </a:p>
+        </p:txBody>
+      </p:sp>
+      <p:sp>
+        <p:nvSpPr>
+          <p:cNvPr id="18" name="Text 16"/>
+          <p:cNvSpPr/>
+          <p:nvPr/>
+        </p:nvSpPr>
+        <p:spPr>
+          <a:xfrm>
+            <a:off x="5806440" y="3547872"/>
             <a:ext cx="5852160" cy="365760"/>
           </a:xfrm>
           <a:prstGeom prst="rect">
@@ -12279,46 +12318,7 @@
               <a:buNone/>
             </a:pPr>
             <a:r>
-              <a:rPr lang="en-US" sz="1450" b="1" dirty="0">
-                <a:solidFill>
-                  <a:srgbClr val="1F2937"/>
-                </a:solidFill>
-                <a:latin typeface="Microsoft JhengHei" pitchFamily="34" charset="0"/>
-                <a:ea typeface="Microsoft JhengHei" pitchFamily="34" charset="-122"/>
-                <a:cs typeface="Microsoft JhengHei" pitchFamily="34" charset="-120"/>
-              </a:rPr>
-              <a:t>統一對比表</a:t>
-            </a:r>
-            <a:endParaRPr lang="en-US" sz="1450" dirty="0"/>
-          </a:p>
-        </p:txBody>
-      </p:sp>
-      <p:sp>
-        <p:nvSpPr>
-          <p:cNvPr id="18" name="Text 16"/>
-          <p:cNvSpPr/>
-          <p:nvPr/>
-        </p:nvSpPr>
-        <p:spPr>
-          <a:xfrm>
-            <a:off x="5806440" y="4050792"/>
-            <a:ext cx="5852160" cy="411480"/>
-          </a:xfrm>
-          <a:prstGeom prst="rect">
-            <a:avLst/>
-          </a:prstGeom>
-          <a:noFill/>
-          <a:ln/>
-        </p:spPr>
-        <p:txBody>
-          <a:bodyPr wrap="square" lIns="0" tIns="0" rIns="0" bIns="0" rtlCol="0" anchor="ctr"/>
-          <a:lstStyle/>
-          <a:p>
-            <a:pPr indent="0" marL="0">
-              <a:buNone/>
-            </a:pPr>
-            <a:r>
-              <a:rPr lang="en-US" sz="1150" dirty="0">
+              <a:rPr lang="en-US" sz="1100" dirty="0">
                 <a:solidFill>
                   <a:srgbClr val="64748B"/>
                 </a:solidFill>
@@ -12326,9 +12326,9 @@
                 <a:ea typeface="Microsoft JhengHei" pitchFamily="34" charset="-122"/>
                 <a:cs typeface="Microsoft JhengHei" pitchFamily="34" charset="-120"/>
               </a:rPr>
-              <a:t>單價／貨期／條款橫向對齊，最低價高亮，幣種自動折算</a:t>
-            </a:r>
-            <a:endParaRPr lang="en-US" sz="1150" dirty="0"/>
+              <a:t>工廠還是貿易商＋風險記錄＋針對性驗廠提問清單</a:t>
+            </a:r>
+            <a:endParaRPr lang="en-US" sz="1100" dirty="0"/>
           </a:p>
         </p:txBody>
       </p:sp>
@@ -12340,12 +12340,12 @@
         </p:nvSpPr>
         <p:spPr>
           <a:xfrm>
-            <a:off x="457200" y="4700016"/>
-            <a:ext cx="4663440" cy="868680"/>
+            <a:off x="457200" y="4059936"/>
+            <a:ext cx="4663440" cy="777240"/>
           </a:xfrm>
           <a:prstGeom prst="roundRect">
             <a:avLst>
-              <a:gd name="adj" fmla="val 8421"/>
+              <a:gd name="adj" fmla="val 9412"/>
             </a:avLst>
           </a:prstGeom>
           <a:solidFill>
@@ -12362,24 +12362,24 @@
         </p:nvSpPr>
         <p:spPr>
           <a:xfrm>
-            <a:off x="640080" y="4700016"/>
-            <a:ext cx="4343400" cy="868680"/>
-          </a:xfrm>
-          <a:prstGeom prst="rect">
-            <a:avLst/>
-          </a:prstGeom>
-          <a:noFill/>
-          <a:ln/>
-        </p:spPr>
-        <p:txBody>
-          <a:bodyPr wrap="square" lIns="0" tIns="0" rIns="0" bIns="0" rtlCol="0" anchor="ctr"/>
-          <a:lstStyle/>
-          <a:p>
-            <a:pPr indent="0" marL="0">
-              <a:buNone/>
-            </a:pPr>
-            <a:r>
-              <a:rPr lang="en-US" sz="1250" b="1" dirty="0">
+            <a:off x="640080" y="4059936"/>
+            <a:ext cx="4343400" cy="777240"/>
+          </a:xfrm>
+          <a:prstGeom prst="rect">
+            <a:avLst/>
+          </a:prstGeom>
+          <a:noFill/>
+          <a:ln/>
+        </p:spPr>
+        <p:txBody>
+          <a:bodyPr wrap="square" lIns="0" tIns="0" rIns="0" bIns="0" rtlCol="0" anchor="ctr"/>
+          <a:lstStyle/>
+          <a:p>
+            <a:pPr indent="0" marL="0">
+              <a:buNone/>
+            </a:pPr>
+            <a:r>
+              <a:rPr lang="en-US" sz="1200" b="1" dirty="0">
                 <a:solidFill>
                   <a:srgbClr val="15514C"/>
                 </a:solidFill>
@@ -12387,9 +12387,9 @@
                 <a:ea typeface="Microsoft JhengHei" pitchFamily="34" charset="-122"/>
                 <a:cs typeface="Microsoft JhengHei" pitchFamily="34" charset="-120"/>
               </a:rPr>
-              <a:t>「1,000 美元換港幣是多少」</a:t>
-            </a:r>
-            <a:endParaRPr lang="en-US" sz="1250" dirty="0"/>
+              <a:t>「這幾份報價幫我對比」（拖文件）</a:t>
+            </a:r>
+            <a:endParaRPr lang="en-US" sz="1200" dirty="0"/>
           </a:p>
         </p:txBody>
       </p:sp>
@@ -12401,8 +12401,8 @@
         </p:nvSpPr>
         <p:spPr>
           <a:xfrm>
-            <a:off x="5230368" y="4700016"/>
-            <a:ext cx="457200" cy="868680"/>
+            <a:off x="5230368" y="4059936"/>
+            <a:ext cx="457200" cy="777240"/>
           </a:xfrm>
           <a:prstGeom prst="rect">
             <a:avLst/>
@@ -12418,7 +12418,7 @@
               <a:buNone/>
             </a:pPr>
             <a:r>
-              <a:rPr lang="en-US" sz="2000" b="1" dirty="0">
+              <a:rPr lang="en-US" sz="1800" b="1" dirty="0">
                 <a:solidFill>
                   <a:srgbClr val="E8590C"/>
                 </a:solidFill>
@@ -12428,7 +12428,7 @@
               </a:rPr>
               <a:t>→</a:t>
             </a:r>
-            <a:endParaRPr lang="en-US" sz="2000" dirty="0"/>
+            <a:endParaRPr lang="en-US" sz="1800" dirty="0"/>
           </a:p>
         </p:txBody>
       </p:sp>
@@ -12440,7 +12440,46 @@
         </p:nvSpPr>
         <p:spPr>
           <a:xfrm>
-            <a:off x="5806440" y="4754880"/>
+            <a:off x="5806440" y="4096512"/>
+            <a:ext cx="5852160" cy="329184"/>
+          </a:xfrm>
+          <a:prstGeom prst="rect">
+            <a:avLst/>
+          </a:prstGeom>
+          <a:noFill/>
+          <a:ln/>
+        </p:spPr>
+        <p:txBody>
+          <a:bodyPr wrap="square" lIns="0" tIns="0" rIns="0" bIns="0" rtlCol="0" anchor="ctr"/>
+          <a:lstStyle/>
+          <a:p>
+            <a:pPr indent="0" marL="0">
+              <a:buNone/>
+            </a:pPr>
+            <a:r>
+              <a:rPr lang="en-US" sz="1400" b="1" dirty="0">
+                <a:solidFill>
+                  <a:srgbClr val="1F2937"/>
+                </a:solidFill>
+                <a:latin typeface="Microsoft JhengHei" pitchFamily="34" charset="0"/>
+                <a:ea typeface="Microsoft JhengHei" pitchFamily="34" charset="-122"/>
+                <a:cs typeface="Microsoft JhengHei" pitchFamily="34" charset="-120"/>
+              </a:rPr>
+              <a:t>統一對比表</a:t>
+            </a:r>
+            <a:endParaRPr lang="en-US" sz="1400" dirty="0"/>
+          </a:p>
+        </p:txBody>
+      </p:sp>
+      <p:sp>
+        <p:nvSpPr>
+          <p:cNvPr id="23" name="Text 21"/>
+          <p:cNvSpPr/>
+          <p:nvPr/>
+        </p:nvSpPr>
+        <p:spPr>
+          <a:xfrm>
+            <a:off x="5806440" y="4443984"/>
             <a:ext cx="5852160" cy="365760"/>
           </a:xfrm>
           <a:prstGeom prst="rect">
@@ -12457,46 +12496,7 @@
               <a:buNone/>
             </a:pPr>
             <a:r>
-              <a:rPr lang="en-US" sz="1450" b="1" dirty="0">
-                <a:solidFill>
-                  <a:srgbClr val="1F2937"/>
-                </a:solidFill>
-                <a:latin typeface="Microsoft JhengHei" pitchFamily="34" charset="0"/>
-                <a:ea typeface="Microsoft JhengHei" pitchFamily="34" charset="-122"/>
-                <a:cs typeface="Microsoft JhengHei" pitchFamily="34" charset="-120"/>
-              </a:rPr>
-              <a:t>匯率速算</a:t>
-            </a:r>
-            <a:endParaRPr lang="en-US" sz="1450" dirty="0"/>
-          </a:p>
-        </p:txBody>
-      </p:sp>
-      <p:sp>
-        <p:nvSpPr>
-          <p:cNvPr id="23" name="Text 21"/>
-          <p:cNvSpPr/>
-          <p:nvPr/>
-        </p:nvSpPr>
-        <p:spPr>
-          <a:xfrm>
-            <a:off x="5806440" y="5129784"/>
-            <a:ext cx="5852160" cy="411480"/>
-          </a:xfrm>
-          <a:prstGeom prst="rect">
-            <a:avLst/>
-          </a:prstGeom>
-          <a:noFill/>
-          <a:ln/>
-        </p:spPr>
-        <p:txBody>
-          <a:bodyPr wrap="square" lIns="0" tIns="0" rIns="0" bIns="0" rtlCol="0" anchor="ctr"/>
-          <a:lstStyle/>
-          <a:p>
-            <a:pPr indent="0" marL="0">
-              <a:buNone/>
-            </a:pPr>
-            <a:r>
-              <a:rPr lang="en-US" sz="1150" dirty="0">
+              <a:rPr lang="en-US" sz="1100" dirty="0">
                 <a:solidFill>
                   <a:srgbClr val="64748B"/>
                 </a:solidFill>
@@ -12504,9 +12504,9 @@
                 <a:ea typeface="Microsoft JhengHei" pitchFamily="34" charset="-122"/>
                 <a:cs typeface="Microsoft JhengHei" pitchFamily="34" charset="-120"/>
               </a:rPr>
-              <a:t>當日中間價，帶來源；整張價格表也能批量換</a:t>
-            </a:r>
-            <a:endParaRPr lang="en-US" sz="1150" dirty="0"/>
+              <a:t>單價／貨期／條款橫向對齊，最低價高亮，幣種自動折算</a:t>
+            </a:r>
+            <a:endParaRPr lang="en-US" sz="1100" dirty="0"/>
           </a:p>
         </p:txBody>
       </p:sp>
@@ -12518,11 +12518,13 @@
         </p:nvSpPr>
         <p:spPr>
           <a:xfrm>
-            <a:off x="0" y="5943600"/>
-            <a:ext cx="12188952" cy="845820"/>
-          </a:xfrm>
-          <a:prstGeom prst="rect">
-            <a:avLst/>
+            <a:off x="457200" y="4956048"/>
+            <a:ext cx="4663440" cy="777240"/>
+          </a:xfrm>
+          <a:prstGeom prst="roundRect">
+            <a:avLst>
+              <a:gd name="adj" fmla="val 9412"/>
+            </a:avLst>
           </a:prstGeom>
           <a:solidFill>
             <a:srgbClr val="EAF3F2"/>
@@ -12533,6 +12535,182 @@
       <p:sp>
         <p:nvSpPr>
           <p:cNvPr id="25" name="Text 23"/>
+          <p:cNvSpPr/>
+          <p:nvPr/>
+        </p:nvSpPr>
+        <p:spPr>
+          <a:xfrm>
+            <a:off x="640080" y="4956048"/>
+            <a:ext cx="4343400" cy="777240"/>
+          </a:xfrm>
+          <a:prstGeom prst="rect">
+            <a:avLst/>
+          </a:prstGeom>
+          <a:noFill/>
+          <a:ln/>
+        </p:spPr>
+        <p:txBody>
+          <a:bodyPr wrap="square" lIns="0" tIns="0" rIns="0" bIns="0" rtlCol="0" anchor="ctr"/>
+          <a:lstStyle/>
+          <a:p>
+            <a:pPr indent="0" marL="0">
+              <a:buNone/>
+            </a:pPr>
+            <a:r>
+              <a:rPr lang="en-US" sz="1200" b="1" dirty="0">
+                <a:solidFill>
+                  <a:srgbClr val="15514C"/>
+                </a:solidFill>
+                <a:latin typeface="Microsoft JhengHei" pitchFamily="34" charset="0"/>
+                <a:ea typeface="Microsoft JhengHei" pitchFamily="34" charset="-122"/>
+                <a:cs typeface="Microsoft JhengHei" pitchFamily="34" charset="-120"/>
+              </a:rPr>
+              <a:t>「1,000 美元換港幣是多少」</a:t>
+            </a:r>
+            <a:endParaRPr lang="en-US" sz="1200" dirty="0"/>
+          </a:p>
+        </p:txBody>
+      </p:sp>
+      <p:sp>
+        <p:nvSpPr>
+          <p:cNvPr id="26" name="Text 24"/>
+          <p:cNvSpPr/>
+          <p:nvPr/>
+        </p:nvSpPr>
+        <p:spPr>
+          <a:xfrm>
+            <a:off x="5230368" y="4956048"/>
+            <a:ext cx="457200" cy="777240"/>
+          </a:xfrm>
+          <a:prstGeom prst="rect">
+            <a:avLst/>
+          </a:prstGeom>
+          <a:noFill/>
+          <a:ln/>
+        </p:spPr>
+        <p:txBody>
+          <a:bodyPr wrap="square" lIns="0" tIns="0" rIns="0" bIns="0" rtlCol="0" anchor="ctr"/>
+          <a:lstStyle/>
+          <a:p>
+            <a:pPr algn="ctr" indent="0" marL="0">
+              <a:buNone/>
+            </a:pPr>
+            <a:r>
+              <a:rPr lang="en-US" sz="1800" b="1" dirty="0">
+                <a:solidFill>
+                  <a:srgbClr val="E8590C"/>
+                </a:solidFill>
+                <a:latin typeface="Microsoft JhengHei" pitchFamily="34" charset="0"/>
+                <a:ea typeface="Microsoft JhengHei" pitchFamily="34" charset="-122"/>
+                <a:cs typeface="Microsoft JhengHei" pitchFamily="34" charset="-120"/>
+              </a:rPr>
+              <a:t>→</a:t>
+            </a:r>
+            <a:endParaRPr lang="en-US" sz="1800" dirty="0"/>
+          </a:p>
+        </p:txBody>
+      </p:sp>
+      <p:sp>
+        <p:nvSpPr>
+          <p:cNvPr id="27" name="Text 25"/>
+          <p:cNvSpPr/>
+          <p:nvPr/>
+        </p:nvSpPr>
+        <p:spPr>
+          <a:xfrm>
+            <a:off x="5806440" y="4992624"/>
+            <a:ext cx="5852160" cy="329184"/>
+          </a:xfrm>
+          <a:prstGeom prst="rect">
+            <a:avLst/>
+          </a:prstGeom>
+          <a:noFill/>
+          <a:ln/>
+        </p:spPr>
+        <p:txBody>
+          <a:bodyPr wrap="square" lIns="0" tIns="0" rIns="0" bIns="0" rtlCol="0" anchor="ctr"/>
+          <a:lstStyle/>
+          <a:p>
+            <a:pPr indent="0" marL="0">
+              <a:buNone/>
+            </a:pPr>
+            <a:r>
+              <a:rPr lang="en-US" sz="1400" b="1" dirty="0">
+                <a:solidFill>
+                  <a:srgbClr val="1F2937"/>
+                </a:solidFill>
+                <a:latin typeface="Microsoft JhengHei" pitchFamily="34" charset="0"/>
+                <a:ea typeface="Microsoft JhengHei" pitchFamily="34" charset="-122"/>
+                <a:cs typeface="Microsoft JhengHei" pitchFamily="34" charset="-120"/>
+              </a:rPr>
+              <a:t>匯率速算</a:t>
+            </a:r>
+            <a:endParaRPr lang="en-US" sz="1400" dirty="0"/>
+          </a:p>
+        </p:txBody>
+      </p:sp>
+      <p:sp>
+        <p:nvSpPr>
+          <p:cNvPr id="28" name="Text 26"/>
+          <p:cNvSpPr/>
+          <p:nvPr/>
+        </p:nvSpPr>
+        <p:spPr>
+          <a:xfrm>
+            <a:off x="5806440" y="5340096"/>
+            <a:ext cx="5852160" cy="365760"/>
+          </a:xfrm>
+          <a:prstGeom prst="rect">
+            <a:avLst/>
+          </a:prstGeom>
+          <a:noFill/>
+          <a:ln/>
+        </p:spPr>
+        <p:txBody>
+          <a:bodyPr wrap="square" lIns="0" tIns="0" rIns="0" bIns="0" rtlCol="0" anchor="ctr"/>
+          <a:lstStyle/>
+          <a:p>
+            <a:pPr indent="0" marL="0">
+              <a:buNone/>
+            </a:pPr>
+            <a:r>
+              <a:rPr lang="en-US" sz="1100" dirty="0">
+                <a:solidFill>
+                  <a:srgbClr val="64748B"/>
+                </a:solidFill>
+                <a:latin typeface="Microsoft JhengHei" pitchFamily="34" charset="0"/>
+                <a:ea typeface="Microsoft JhengHei" pitchFamily="34" charset="-122"/>
+                <a:cs typeface="Microsoft JhengHei" pitchFamily="34" charset="-120"/>
+              </a:rPr>
+              <a:t>當日中間價，帶來源；整張價格表也能批量換</a:t>
+            </a:r>
+            <a:endParaRPr lang="en-US" sz="1100" dirty="0"/>
+          </a:p>
+        </p:txBody>
+      </p:sp>
+      <p:sp>
+        <p:nvSpPr>
+          <p:cNvPr id="29" name="Shape 27"/>
+          <p:cNvSpPr/>
+          <p:nvPr/>
+        </p:nvSpPr>
+        <p:spPr>
+          <a:xfrm>
+            <a:off x="0" y="5943600"/>
+            <a:ext cx="12188952" cy="845820"/>
+          </a:xfrm>
+          <a:prstGeom prst="rect">
+            <a:avLst/>
+          </a:prstGeom>
+          <a:solidFill>
+            <a:srgbClr val="EAF3F2"/>
+          </a:solidFill>
+          <a:ln/>
+        </p:spPr>
+      </p:sp>
+      <p:sp>
+        <p:nvSpPr>
+          <p:cNvPr id="30" name="Text 28"/>
           <p:cNvSpPr/>
           <p:nvPr/>
         </p:nvSpPr>

--- a/推广/1688選品篩選工作冊.pptx
+++ b/推广/1688選品篩選工作冊.pptx
@@ -1888,7 +1888,7 @@
                 <a:ea typeface="Microsoft JhengHei" pitchFamily="34" charset="-122"/>
                 <a:cs typeface="Microsoft JhengHei" pitchFamily="34" charset="-120"/>
               </a:rPr>
-              <a:t>配合 Luma AI 使用 · 2026 年 10 月版</a:t>
+              <a:t>配合畢卡索 AI 使用 · 2026 年 10 月版</a:t>
             </a:r>
             <a:endParaRPr lang="en-US" sz="1250" dirty="0"/>
           </a:p>
@@ -2060,7 +2060,7 @@
                 <a:ea typeface="Microsoft JhengHei" pitchFamily="34" charset="-122"/>
                 <a:cs typeface="Microsoft JhengHei" pitchFamily="34" charset="-120"/>
               </a:rPr>
-              <a:t>Luma · 敏寶團隊 AI　|　網頁 47.243.79.144　|　飛書搜 HarmesAgent</a:t>
+              <a:t>畢卡索 · 敏寶團隊 AI　|　網頁 47.243.79.144　|　飛書搜 HarmesAgent</a:t>
             </a:r>
             <a:endParaRPr lang="en-US" sz="1250" dirty="0"/>
           </a:p>
@@ -3720,7 +3720,7 @@
                 <a:ea typeface="Microsoft JhengHei" pitchFamily="34" charset="-122"/>
                 <a:cs typeface="Microsoft JhengHei" pitchFamily="34" charset="-120"/>
               </a:rPr>
-              <a:t>每個候選品一張評估卡，月度選品會直接拿這本冊子過單；Luma 能代填的部分見頁 9。</a:t>
+              <a:t>每個候選品一張評估卡，月度選品會直接拿這本冊子過單；畢卡索 能代填的部分見頁 9。</a:t>
             </a:r>
             <a:endParaRPr lang="en-US" sz="1250" dirty="0"/>
           </a:p>
@@ -11753,7 +11753,7 @@
                 <a:ea typeface="Microsoft JhengHei" pitchFamily="34" charset="-122"/>
                 <a:cs typeface="Microsoft JhengHei" pitchFamily="34" charset="-120"/>
               </a:rPr>
-              <a:t>配合 Luma AI</a:t>
+              <a:t>配合畢卡索 AI</a:t>
             </a:r>
             <a:endParaRPr lang="en-US" sz="1200" dirty="0"/>
           </a:p>
@@ -11792,7 +11792,7 @@
                 <a:ea typeface="Microsoft JhengHei" pitchFamily="34" charset="-122"/>
                 <a:cs typeface="Microsoft JhengHei" pitchFamily="34" charset="-120"/>
               </a:rPr>
-              <a:t>髒活交給 Luma，你只做判斷</a:t>
+              <a:t>髒活交給畢卡索，你只做判斷</a:t>
             </a:r>
             <a:endParaRPr lang="en-US" sz="2600" dirty="0"/>
           </a:p>
